--- a/fixtures/briefs/drift/base.pptx
+++ b/fixtures/briefs/drift/base.pptx
@@ -848,7 +848,7 @@
           <a:noFill/>
         </p:spPr>
         <p:txBody>
-          <a:bodyPr vert="horz" wrap="square" lIns="0" tIns="0" rIns="0" bIns="0" rtlCol="0" anchor="t">
+          <a:bodyPr vert="horz" wrap="square" lIns="0" tIns="0" rIns="0" bIns="18582" rtlCol="0" anchor="b">
             <a:noAutofit/>
           </a:bodyPr>
           <a:lstStyle>
@@ -1347,7 +1347,7 @@
           <a:noFill/>
         </p:spPr>
         <p:txBody>
-          <a:bodyPr vert="horz" wrap="square" lIns="0" tIns="0" rIns="0" bIns="0" rtlCol="0" anchor="t">
+          <a:bodyPr vert="horz" wrap="square" lIns="0" tIns="0" rIns="0" bIns="13514" rtlCol="0" anchor="b">
             <a:noAutofit/>
           </a:bodyPr>
           <a:lstStyle>
@@ -1528,7 +1528,7 @@
           <a:noFill/>
         </p:spPr>
         <p:txBody>
-          <a:bodyPr vert="horz" wrap="square" lIns="0" tIns="0" rIns="0" bIns="0" rtlCol="0" anchor="t">
+          <a:bodyPr vert="horz" wrap="square" lIns="0" tIns="0" rIns="0" bIns="13514" rtlCol="0" anchor="b">
             <a:noAutofit/>
           </a:bodyPr>
           <a:lstStyle>
@@ -1890,7 +1890,7 @@
           <a:noFill/>
         </p:spPr>
         <p:txBody>
-          <a:bodyPr vert="horz" wrap="square" lIns="0" tIns="0" rIns="0" bIns="0" rtlCol="0" anchor="t">
+          <a:bodyPr vert="horz" wrap="square" lIns="0" tIns="0" rIns="0" bIns="18582" rtlCol="0" anchor="b">
             <a:noAutofit/>
           </a:bodyPr>
           <a:lstStyle>

--- a/fixtures/briefs/drift/base.pptx
+++ b/fixtures/briefs/drift/base.pptx
@@ -848,7 +848,7 @@
           <a:noFill/>
         </p:spPr>
         <p:txBody>
-          <a:bodyPr vert="horz" wrap="square" lIns="0" tIns="0" rIns="0" bIns="18582" rtlCol="0" anchor="b">
+          <a:bodyPr vert="horz" wrap="square" lIns="0" tIns="0" rIns="0" bIns="41910" rtlCol="0" anchor="b">
             <a:noAutofit/>
           </a:bodyPr>
           <a:lstStyle>
@@ -1347,7 +1347,7 @@
           <a:noFill/>
         </p:spPr>
         <p:txBody>
-          <a:bodyPr vert="horz" wrap="square" lIns="0" tIns="0" rIns="0" bIns="13514" rtlCol="0" anchor="b">
+          <a:bodyPr vert="horz" wrap="square" lIns="0" tIns="0" rIns="0" bIns="30480" rtlCol="0" anchor="b">
             <a:noAutofit/>
           </a:bodyPr>
           <a:lstStyle>
@@ -1528,7 +1528,7 @@
           <a:noFill/>
         </p:spPr>
         <p:txBody>
-          <a:bodyPr vert="horz" wrap="square" lIns="0" tIns="0" rIns="0" bIns="13514" rtlCol="0" anchor="b">
+          <a:bodyPr vert="horz" wrap="square" lIns="0" tIns="0" rIns="0" bIns="30480" rtlCol="0" anchor="b">
             <a:noAutofit/>
           </a:bodyPr>
           <a:lstStyle>
@@ -1890,7 +1890,7 @@
           <a:noFill/>
         </p:spPr>
         <p:txBody>
-          <a:bodyPr vert="horz" wrap="square" lIns="0" tIns="0" rIns="0" bIns="18582" rtlCol="0" anchor="b">
+          <a:bodyPr vert="horz" wrap="square" lIns="0" tIns="0" rIns="0" bIns="41910" rtlCol="0" anchor="b">
             <a:noAutofit/>
           </a:bodyPr>
           <a:lstStyle>

--- a/fixtures/briefs/drift/base.pptx
+++ b/fixtures/briefs/drift/base.pptx
@@ -30,6 +30,7 @@
           <a:srgbClr val="111111"/>
         </a:solidFill>
         <a:latin typeface="+mn-lt"/>
+        <a:cs typeface="+mn-cs"/>
       </a:defRPr>
     </a:lvl1pPr>
     <a:lvl2pPr marL="0" indent="0" algn="l">
@@ -48,6 +49,7 @@
           <a:srgbClr val="111111"/>
         </a:solidFill>
         <a:latin typeface="+mn-lt"/>
+        <a:cs typeface="+mn-cs"/>
       </a:defRPr>
     </a:lvl2pPr>
     <a:lvl3pPr marL="0" indent="0" algn="l">
@@ -66,6 +68,7 @@
           <a:srgbClr val="111111"/>
         </a:solidFill>
         <a:latin typeface="+mn-lt"/>
+        <a:cs typeface="+mn-cs"/>
       </a:defRPr>
     </a:lvl3pPr>
     <a:lvl4pPr marL="0" indent="0" algn="l">
@@ -84,6 +87,7 @@
           <a:srgbClr val="111111"/>
         </a:solidFill>
         <a:latin typeface="+mn-lt"/>
+        <a:cs typeface="+mn-cs"/>
       </a:defRPr>
     </a:lvl4pPr>
     <a:lvl5pPr marL="0" indent="0" algn="l">
@@ -102,6 +106,7 @@
           <a:srgbClr val="111111"/>
         </a:solidFill>
         <a:latin typeface="+mn-lt"/>
+        <a:cs typeface="+mn-cs"/>
       </a:defRPr>
     </a:lvl5pPr>
     <a:lvl6pPr marL="0" indent="0" algn="l">
@@ -120,6 +125,7 @@
           <a:srgbClr val="111111"/>
         </a:solidFill>
         <a:latin typeface="+mn-lt"/>
+        <a:cs typeface="+mn-cs"/>
       </a:defRPr>
     </a:lvl6pPr>
     <a:lvl7pPr marL="0" indent="0" algn="l">
@@ -138,6 +144,7 @@
           <a:srgbClr val="111111"/>
         </a:solidFill>
         <a:latin typeface="+mn-lt"/>
+        <a:cs typeface="+mn-cs"/>
       </a:defRPr>
     </a:lvl7pPr>
     <a:lvl8pPr marL="0" indent="0" algn="l">
@@ -156,6 +163,7 @@
           <a:srgbClr val="111111"/>
         </a:solidFill>
         <a:latin typeface="+mn-lt"/>
+        <a:cs typeface="+mn-cs"/>
       </a:defRPr>
     </a:lvl8pPr>
     <a:lvl9pPr marL="0" indent="0" algn="l">
@@ -174,6 +182,7 @@
           <a:srgbClr val="111111"/>
         </a:solidFill>
         <a:latin typeface="+mn-lt"/>
+        <a:cs typeface="+mn-cs"/>
       </a:defRPr>
     </a:lvl9pPr>
   </p:defaultTextStyle>
@@ -868,6 +877,7 @@
                   <a:srgbClr val="111111"/>
                 </a:solidFill>
                 <a:latin typeface="+mj-lt"/>
+                <a:cs typeface="+mj-cs"/>
               </a:defRPr>
             </a:lvl1pPr>
           </a:lstStyle>
@@ -920,6 +930,7 @@
                   <a:srgbClr val="111111"/>
                 </a:solidFill>
                 <a:latin typeface="+mn-lt"/>
+                <a:cs typeface="+mn-cs"/>
               </a:defRPr>
             </a:lvl1pPr>
           </a:lstStyle>
@@ -972,6 +983,7 @@
                   <a:srgbClr val="5C5C5A"/>
                 </a:solidFill>
                 <a:latin typeface="+mn-lt"/>
+                <a:cs typeface="+mn-cs"/>
               </a:defRPr>
             </a:lvl1pPr>
           </a:lstStyle>
@@ -1057,6 +1069,7 @@
                   <a:srgbClr val="F2F2F0"/>
                 </a:solidFill>
                 <a:latin typeface="+mj-lt"/>
+                <a:cs typeface="+mj-cs"/>
               </a:defRPr>
             </a:lvl1pPr>
           </a:lstStyle>
@@ -1109,6 +1122,7 @@
                   <a:srgbClr val="E8422E"/>
                 </a:solidFill>
                 <a:latin typeface="+mn-lt"/>
+                <a:cs typeface="+mn-cs"/>
               </a:defRPr>
             </a:lvl1pPr>
           </a:lstStyle>
@@ -1186,6 +1200,7 @@
                   <a:srgbClr val="111111"/>
                 </a:solidFill>
                 <a:latin typeface="+mj-lt"/>
+                <a:cs typeface="+mj-cs"/>
               </a:defRPr>
             </a:lvl1pPr>
           </a:lstStyle>
@@ -1238,6 +1253,7 @@
                   <a:srgbClr val="111111"/>
                 </a:solidFill>
                 <a:latin typeface="+mn-lt"/>
+                <a:cs typeface="+mn-cs"/>
               </a:defRPr>
             </a:lvl1pPr>
           </a:lstStyle>
@@ -1290,6 +1306,7 @@
                   <a:srgbClr val="5C5C5A"/>
                 </a:solidFill>
                 <a:latin typeface="+mn-lt"/>
+                <a:cs typeface="+mn-cs"/>
               </a:defRPr>
             </a:lvl1pPr>
           </a:lstStyle>
@@ -1367,6 +1384,7 @@
                   <a:srgbClr val="111111"/>
                 </a:solidFill>
                 <a:latin typeface="+mj-lt"/>
+                <a:cs typeface="+mj-cs"/>
               </a:defRPr>
             </a:lvl1pPr>
           </a:lstStyle>
@@ -1419,6 +1437,7 @@
                   <a:srgbClr val="111111"/>
                 </a:solidFill>
                 <a:latin typeface="+mn-lt"/>
+                <a:cs typeface="+mn-cs"/>
               </a:defRPr>
             </a:lvl1pPr>
           </a:lstStyle>
@@ -1471,6 +1490,7 @@
                   <a:srgbClr val="5C5C5A"/>
                 </a:solidFill>
                 <a:latin typeface="+mn-lt"/>
+                <a:cs typeface="+mn-cs"/>
               </a:defRPr>
             </a:lvl1pPr>
           </a:lstStyle>
@@ -1548,6 +1568,7 @@
                   <a:srgbClr val="111111"/>
                 </a:solidFill>
                 <a:latin typeface="+mj-lt"/>
+                <a:cs typeface="+mj-cs"/>
               </a:defRPr>
             </a:lvl1pPr>
           </a:lstStyle>
@@ -1600,6 +1621,7 @@
                   <a:srgbClr val="111111"/>
                 </a:solidFill>
                 <a:latin typeface="+mn-lt"/>
+                <a:cs typeface="+mn-cs"/>
               </a:defRPr>
             </a:lvl1pPr>
           </a:lstStyle>
@@ -1652,6 +1674,7 @@
                   <a:srgbClr val="111111"/>
                 </a:solidFill>
                 <a:latin typeface="+mn-lt"/>
+                <a:cs typeface="+mn-cs"/>
               </a:defRPr>
             </a:lvl1pPr>
           </a:lstStyle>
@@ -1704,6 +1727,7 @@
                   <a:srgbClr val="5C5C5A"/>
                 </a:solidFill>
                 <a:latin typeface="+mn-lt"/>
+                <a:cs typeface="+mn-cs"/>
               </a:defRPr>
             </a:lvl1pPr>
           </a:lstStyle>
@@ -1781,6 +1805,7 @@
                   <a:srgbClr val="111111"/>
                 </a:solidFill>
                 <a:latin typeface="+mj-lt"/>
+                <a:cs typeface="+mj-cs"/>
               </a:defRPr>
             </a:lvl1pPr>
           </a:lstStyle>
@@ -1833,6 +1858,7 @@
                   <a:srgbClr val="5C5C5A"/>
                 </a:solidFill>
                 <a:latin typeface="+mn-lt"/>
+                <a:cs typeface="+mn-cs"/>
               </a:defRPr>
             </a:lvl1pPr>
           </a:lstStyle>
@@ -1910,6 +1936,7 @@
                   <a:srgbClr val="111111"/>
                 </a:solidFill>
                 <a:latin typeface="+mj-lt"/>
+                <a:cs typeface="+mj-cs"/>
               </a:defRPr>
             </a:lvl1pPr>
           </a:lstStyle>
@@ -1962,6 +1989,7 @@
                   <a:srgbClr val="111111"/>
                 </a:solidFill>
                 <a:latin typeface="+mn-lt"/>
+                <a:cs typeface="+mn-cs"/>
               </a:defRPr>
             </a:lvl1pPr>
           </a:lstStyle>
@@ -2014,6 +2042,7 @@
                   <a:srgbClr val="5C5C5A"/>
                 </a:solidFill>
                 <a:latin typeface="+mn-lt"/>
+                <a:cs typeface="+mn-cs"/>
               </a:defRPr>
             </a:lvl1pPr>
           </a:lstStyle>
@@ -2099,6 +2128,7 @@
                   <a:srgbClr val="111111"/>
                 </a:solidFill>
                 <a:latin typeface="+mj-lt"/>
+                <a:cs typeface="+mj-cs"/>
               </a:defRPr>
             </a:lvl1pPr>
           </a:lstStyle>
@@ -2151,6 +2181,7 @@
                   <a:srgbClr val="111111"/>
                 </a:solidFill>
                 <a:latin typeface="+mn-lt"/>
+                <a:cs typeface="+mn-cs"/>
               </a:defRPr>
             </a:lvl1pPr>
           </a:lstStyle>
@@ -2192,6 +2223,7 @@
             <a:srgbClr val="111111"/>
           </a:solidFill>
           <a:latin typeface="+mj-lt"/>
+          <a:cs typeface="+mj-cs"/>
         </a:defRPr>
       </a:lvl1pPr>
       <a:lvl2pPr marL="0" indent="0" algn="l">
@@ -2210,6 +2242,7 @@
             <a:srgbClr val="111111"/>
           </a:solidFill>
           <a:latin typeface="+mj-lt"/>
+          <a:cs typeface="+mj-cs"/>
         </a:defRPr>
       </a:lvl2pPr>
       <a:lvl3pPr marL="0" indent="0" algn="l">
@@ -2228,6 +2261,7 @@
             <a:srgbClr val="111111"/>
           </a:solidFill>
           <a:latin typeface="+mj-lt"/>
+          <a:cs typeface="+mj-cs"/>
         </a:defRPr>
       </a:lvl3pPr>
       <a:lvl4pPr marL="0" indent="0" algn="l">
@@ -2246,6 +2280,7 @@
             <a:srgbClr val="111111"/>
           </a:solidFill>
           <a:latin typeface="+mj-lt"/>
+          <a:cs typeface="+mj-cs"/>
         </a:defRPr>
       </a:lvl4pPr>
       <a:lvl5pPr marL="0" indent="0" algn="l">
@@ -2264,6 +2299,7 @@
             <a:srgbClr val="111111"/>
           </a:solidFill>
           <a:latin typeface="+mj-lt"/>
+          <a:cs typeface="+mj-cs"/>
         </a:defRPr>
       </a:lvl5pPr>
       <a:lvl6pPr marL="0" indent="0" algn="l">
@@ -2282,6 +2318,7 @@
             <a:srgbClr val="111111"/>
           </a:solidFill>
           <a:latin typeface="+mj-lt"/>
+          <a:cs typeface="+mj-cs"/>
         </a:defRPr>
       </a:lvl6pPr>
       <a:lvl7pPr marL="0" indent="0" algn="l">
@@ -2300,6 +2337,7 @@
             <a:srgbClr val="111111"/>
           </a:solidFill>
           <a:latin typeface="+mj-lt"/>
+          <a:cs typeface="+mj-cs"/>
         </a:defRPr>
       </a:lvl7pPr>
       <a:lvl8pPr marL="0" indent="0" algn="l">
@@ -2318,6 +2356,7 @@
             <a:srgbClr val="111111"/>
           </a:solidFill>
           <a:latin typeface="+mj-lt"/>
+          <a:cs typeface="+mj-cs"/>
         </a:defRPr>
       </a:lvl8pPr>
       <a:lvl9pPr marL="0" indent="0" algn="l">
@@ -2336,6 +2375,7 @@
             <a:srgbClr val="111111"/>
           </a:solidFill>
           <a:latin typeface="+mj-lt"/>
+          <a:cs typeface="+mj-cs"/>
         </a:defRPr>
       </a:lvl9pPr>
     </p:titleStyle>
@@ -2356,6 +2396,7 @@
             <a:srgbClr val="111111"/>
           </a:solidFill>
           <a:latin typeface="+mn-lt"/>
+          <a:cs typeface="+mn-cs"/>
         </a:defRPr>
       </a:lvl1pPr>
       <a:lvl2pPr marL="0" indent="0" algn="l">
@@ -2374,6 +2415,7 @@
             <a:srgbClr val="111111"/>
           </a:solidFill>
           <a:latin typeface="+mn-lt"/>
+          <a:cs typeface="+mn-cs"/>
         </a:defRPr>
       </a:lvl2pPr>
       <a:lvl3pPr marL="0" indent="0" algn="l">
@@ -2392,6 +2434,7 @@
             <a:srgbClr val="111111"/>
           </a:solidFill>
           <a:latin typeface="+mn-lt"/>
+          <a:cs typeface="+mn-cs"/>
         </a:defRPr>
       </a:lvl3pPr>
       <a:lvl4pPr marL="0" indent="0" algn="l">
@@ -2410,6 +2453,7 @@
             <a:srgbClr val="111111"/>
           </a:solidFill>
           <a:latin typeface="+mn-lt"/>
+          <a:cs typeface="+mn-cs"/>
         </a:defRPr>
       </a:lvl4pPr>
       <a:lvl5pPr marL="0" indent="0" algn="l">
@@ -2428,6 +2472,7 @@
             <a:srgbClr val="111111"/>
           </a:solidFill>
           <a:latin typeface="+mn-lt"/>
+          <a:cs typeface="+mn-cs"/>
         </a:defRPr>
       </a:lvl5pPr>
       <a:lvl6pPr marL="0" indent="0" algn="l">
@@ -2446,6 +2491,7 @@
             <a:srgbClr val="111111"/>
           </a:solidFill>
           <a:latin typeface="+mn-lt"/>
+          <a:cs typeface="+mn-cs"/>
         </a:defRPr>
       </a:lvl6pPr>
       <a:lvl7pPr marL="0" indent="0" algn="l">
@@ -2464,6 +2510,7 @@
             <a:srgbClr val="111111"/>
           </a:solidFill>
           <a:latin typeface="+mn-lt"/>
+          <a:cs typeface="+mn-cs"/>
         </a:defRPr>
       </a:lvl7pPr>
       <a:lvl8pPr marL="0" indent="0" algn="l">
@@ -2482,6 +2529,7 @@
             <a:srgbClr val="111111"/>
           </a:solidFill>
           <a:latin typeface="+mn-lt"/>
+          <a:cs typeface="+mn-cs"/>
         </a:defRPr>
       </a:lvl8pPr>
       <a:lvl9pPr marL="0" indent="0" algn="l">
@@ -2500,6 +2548,7 @@
             <a:srgbClr val="111111"/>
           </a:solidFill>
           <a:latin typeface="+mn-lt"/>
+          <a:cs typeface="+mn-cs"/>
         </a:defRPr>
       </a:lvl9pPr>
     </p:bodyStyle>
@@ -2520,6 +2569,7 @@
             <a:srgbClr val="111111"/>
           </a:solidFill>
           <a:latin typeface="+mn-lt"/>
+          <a:cs typeface="+mn-cs"/>
         </a:defRPr>
       </a:lvl1pPr>
       <a:lvl2pPr marL="0" indent="0" algn="l">
@@ -2538,6 +2588,7 @@
             <a:srgbClr val="111111"/>
           </a:solidFill>
           <a:latin typeface="+mn-lt"/>
+          <a:cs typeface="+mn-cs"/>
         </a:defRPr>
       </a:lvl2pPr>
       <a:lvl3pPr marL="0" indent="0" algn="l">
@@ -2556,6 +2607,7 @@
             <a:srgbClr val="111111"/>
           </a:solidFill>
           <a:latin typeface="+mn-lt"/>
+          <a:cs typeface="+mn-cs"/>
         </a:defRPr>
       </a:lvl3pPr>
       <a:lvl4pPr marL="0" indent="0" algn="l">
@@ -2574,6 +2626,7 @@
             <a:srgbClr val="111111"/>
           </a:solidFill>
           <a:latin typeface="+mn-lt"/>
+          <a:cs typeface="+mn-cs"/>
         </a:defRPr>
       </a:lvl4pPr>
       <a:lvl5pPr marL="0" indent="0" algn="l">
@@ -2592,6 +2645,7 @@
             <a:srgbClr val="111111"/>
           </a:solidFill>
           <a:latin typeface="+mn-lt"/>
+          <a:cs typeface="+mn-cs"/>
         </a:defRPr>
       </a:lvl5pPr>
       <a:lvl6pPr marL="0" indent="0" algn="l">
@@ -2610,6 +2664,7 @@
             <a:srgbClr val="111111"/>
           </a:solidFill>
           <a:latin typeface="+mn-lt"/>
+          <a:cs typeface="+mn-cs"/>
         </a:defRPr>
       </a:lvl6pPr>
       <a:lvl7pPr marL="0" indent="0" algn="l">
@@ -2628,6 +2683,7 @@
             <a:srgbClr val="111111"/>
           </a:solidFill>
           <a:latin typeface="+mn-lt"/>
+          <a:cs typeface="+mn-cs"/>
         </a:defRPr>
       </a:lvl7pPr>
       <a:lvl8pPr marL="0" indent="0" algn="l">
@@ -2646,6 +2702,7 @@
             <a:srgbClr val="111111"/>
           </a:solidFill>
           <a:latin typeface="+mn-lt"/>
+          <a:cs typeface="+mn-cs"/>
         </a:defRPr>
       </a:lvl8pPr>
       <a:lvl9pPr marL="0" indent="0" algn="l">
@@ -2664,6 +2721,7 @@
             <a:srgbClr val="111111"/>
           </a:solidFill>
           <a:latin typeface="+mn-lt"/>
+          <a:cs typeface="+mn-cs"/>
         </a:defRPr>
       </a:lvl9pPr>
     </p:otherStyle>
@@ -3144,12 +3202,12 @@
       <a:majorFont>
         <a:latin typeface="Arial"/>
         <a:ea typeface=""/>
-        <a:cs typeface=""/>
+        <a:cs typeface="Arial"/>
       </a:majorFont>
       <a:minorFont>
         <a:latin typeface="Arial"/>
         <a:ea typeface=""/>
-        <a:cs typeface=""/>
+        <a:cs typeface="Arial"/>
       </a:minorFont>
     </a:fontScheme>
     <a:fmtScheme name="swiss">
